--- a/PfnP.pptx
+++ b/PfnP.pptx
@@ -138,7 +138,7 @@
   <pc:docChgLst>
     <pc:chgData name="Jim Downie" userId="a5c9779c-6a4b-4ea5-a3cd-3c8ffdb229a9" providerId="ADAL" clId="{18A593ED-C514-43D8-94F2-DC3D775FA224}"/>
     <pc:docChg chg="undo custSel addSld delSld modSld sldOrd modMainMaster">
-      <pc:chgData name="Jim Downie" userId="a5c9779c-6a4b-4ea5-a3cd-3c8ffdb229a9" providerId="ADAL" clId="{18A593ED-C514-43D8-94F2-DC3D775FA224}" dt="2026-04-27T10:13:56.162" v="265" actId="47"/>
+      <pc:chgData name="Jim Downie" userId="a5c9779c-6a4b-4ea5-a3cd-3c8ffdb229a9" providerId="ADAL" clId="{18A593ED-C514-43D8-94F2-DC3D775FA224}" dt="2026-04-30T16:16:26.397" v="267" actId="20577"/>
       <pc:docMkLst>
         <pc:docMk/>
       </pc:docMkLst>
@@ -156,13 +156,6 @@
             <ac:spMk id="5" creationId="{49A2333B-FED8-0CA3-34FF-831BAA934D1C}"/>
           </ac:spMkLst>
         </pc:spChg>
-      </pc:sldChg>
-      <pc:sldChg chg="del">
-        <pc:chgData name="Jim Downie" userId="a5c9779c-6a4b-4ea5-a3cd-3c8ffdb229a9" providerId="ADAL" clId="{18A593ED-C514-43D8-94F2-DC3D775FA224}" dt="2026-04-27T10:13:56.162" v="265" actId="47"/>
-        <pc:sldMkLst>
-          <pc:docMk/>
-          <pc:sldMk cId="1790963796" sldId="272"/>
-        </pc:sldMkLst>
       </pc:sldChg>
       <pc:sldChg chg="addSp delSp modSp mod">
         <pc:chgData name="Jim Downie" userId="a5c9779c-6a4b-4ea5-a3cd-3c8ffdb229a9" providerId="ADAL" clId="{18A593ED-C514-43D8-94F2-DC3D775FA224}" dt="2026-04-23T16:15:58.157" v="253" actId="12789"/>
@@ -204,13 +197,13 @@
         </pc:picChg>
       </pc:sldChg>
       <pc:sldChg chg="addSp delSp modSp mod addAnim delAnim modAnim">
-        <pc:chgData name="Jim Downie" userId="a5c9779c-6a4b-4ea5-a3cd-3c8ffdb229a9" providerId="ADAL" clId="{18A593ED-C514-43D8-94F2-DC3D775FA224}" dt="2026-04-27T10:13:32.846" v="264" actId="20577"/>
+        <pc:chgData name="Jim Downie" userId="a5c9779c-6a4b-4ea5-a3cd-3c8ffdb229a9" providerId="ADAL" clId="{18A593ED-C514-43D8-94F2-DC3D775FA224}" dt="2026-04-30T16:16:26.397" v="267" actId="20577"/>
         <pc:sldMkLst>
           <pc:docMk/>
           <pc:sldMk cId="2851842700" sldId="283"/>
         </pc:sldMkLst>
         <pc:spChg chg="add del mod">
-          <ac:chgData name="Jim Downie" userId="a5c9779c-6a4b-4ea5-a3cd-3c8ffdb229a9" providerId="ADAL" clId="{18A593ED-C514-43D8-94F2-DC3D775FA224}" dt="2026-04-27T10:13:32.846" v="264" actId="20577"/>
+          <ac:chgData name="Jim Downie" userId="a5c9779c-6a4b-4ea5-a3cd-3c8ffdb229a9" providerId="ADAL" clId="{18A593ED-C514-43D8-94F2-DC3D775FA224}" dt="2026-04-30T16:16:26.397" v="267" actId="20577"/>
           <ac:spMkLst>
             <pc:docMk/>
             <pc:sldMk cId="2851842700" sldId="283"/>
@@ -316,14 +309,6 @@
           <pc:docMk/>
           <pc:sldMasterMk cId="888505036" sldId="2147483899"/>
         </pc:sldMasterMkLst>
-        <pc:sldLayoutChg chg="del">
-          <pc:chgData name="Jim Downie" userId="a5c9779c-6a4b-4ea5-a3cd-3c8ffdb229a9" providerId="ADAL" clId="{18A593ED-C514-43D8-94F2-DC3D775FA224}" dt="2026-04-27T10:13:56.162" v="265" actId="47"/>
-          <pc:sldLayoutMkLst>
-            <pc:docMk/>
-            <pc:sldMasterMk cId="888505036" sldId="2147483899"/>
-            <pc:sldLayoutMk cId="2395489620" sldId="2147483913"/>
-          </pc:sldLayoutMkLst>
-        </pc:sldLayoutChg>
       </pc:sldMasterChg>
       <pc:sldMasterChg chg="modTransition modSldLayout">
         <pc:chgData name="Jim Downie" userId="a5c9779c-6a4b-4ea5-a3cd-3c8ffdb229a9" providerId="ADAL" clId="{18A593ED-C514-43D8-94F2-DC3D775FA224}" dt="2026-04-23T16:15:18.622" v="208"/>
@@ -427,7 +412,7 @@
           <a:p>
             <a:fld id="{AFB0A948-B3F3-47B6-9A13-4CC787086DC0}" type="datetimeFigureOut">
               <a:rPr lang="en-GB" smtClean="0"/>
-              <a:t>27/04/2026</a:t>
+              <a:t>30/04/2026</a:t>
             </a:fld>
             <a:endParaRPr lang="en-GB"/>
           </a:p>
@@ -4195,7 +4180,7 @@
           <a:p>
             <a:fld id="{F742B68F-2629-43F7-B359-B7BC46F8462A}" type="datetimeFigureOut">
               <a:rPr lang="en-GB" smtClean="0"/>
-              <a:t>27/04/2026</a:t>
+              <a:t>30/04/2026</a:t>
             </a:fld>
             <a:endParaRPr lang="en-GB"/>
           </a:p>
@@ -4736,7 +4721,7 @@
           <a:p>
             <a:fld id="{F742B68F-2629-43F7-B359-B7BC46F8462A}" type="datetimeFigureOut">
               <a:rPr lang="en-GB" smtClean="0"/>
-              <a:t>27/04/2026</a:t>
+              <a:t>30/04/2026</a:t>
             </a:fld>
             <a:endParaRPr lang="en-GB"/>
           </a:p>
@@ -4986,7 +4971,7 @@
           <a:p>
             <a:fld id="{F742B68F-2629-43F7-B359-B7BC46F8462A}" type="datetimeFigureOut">
               <a:rPr lang="en-GB" smtClean="0"/>
-              <a:t>27/04/2026</a:t>
+              <a:t>30/04/2026</a:t>
             </a:fld>
             <a:endParaRPr lang="en-GB"/>
           </a:p>
@@ -5222,7 +5207,7 @@
           <a:p>
             <a:fld id="{F742B68F-2629-43F7-B359-B7BC46F8462A}" type="datetimeFigureOut">
               <a:rPr lang="en-GB" smtClean="0"/>
-              <a:t>27/04/2026</a:t>
+              <a:t>30/04/2026</a:t>
             </a:fld>
             <a:endParaRPr lang="en-GB"/>
           </a:p>
@@ -5593,7 +5578,7 @@
           <a:p>
             <a:fld id="{F742B68F-2629-43F7-B359-B7BC46F8462A}" type="datetimeFigureOut">
               <a:rPr lang="en-GB" smtClean="0"/>
-              <a:t>27/04/2026</a:t>
+              <a:t>30/04/2026</a:t>
             </a:fld>
             <a:endParaRPr lang="en-GB"/>
           </a:p>
@@ -5715,7 +5700,7 @@
           <a:p>
             <a:fld id="{F742B68F-2629-43F7-B359-B7BC46F8462A}" type="datetimeFigureOut">
               <a:rPr lang="en-GB" smtClean="0"/>
-              <a:t>27/04/2026</a:t>
+              <a:t>30/04/2026</a:t>
             </a:fld>
             <a:endParaRPr lang="en-GB"/>
           </a:p>
@@ -5814,7 +5799,7 @@
           <a:p>
             <a:fld id="{F742B68F-2629-43F7-B359-B7BC46F8462A}" type="datetimeFigureOut">
               <a:rPr lang="en-GB" smtClean="0"/>
-              <a:t>27/04/2026</a:t>
+              <a:t>30/04/2026</a:t>
             </a:fld>
             <a:endParaRPr lang="en-GB"/>
           </a:p>
@@ -6095,7 +6080,7 @@
           <a:p>
             <a:fld id="{F742B68F-2629-43F7-B359-B7BC46F8462A}" type="datetimeFigureOut">
               <a:rPr lang="en-GB" smtClean="0"/>
-              <a:t>27/04/2026</a:t>
+              <a:t>30/04/2026</a:t>
             </a:fld>
             <a:endParaRPr lang="en-GB"/>
           </a:p>
@@ -6356,7 +6341,7 @@
           <a:p>
             <a:fld id="{F742B68F-2629-43F7-B359-B7BC46F8462A}" type="datetimeFigureOut">
               <a:rPr lang="en-GB" smtClean="0"/>
-              <a:t>27/04/2026</a:t>
+              <a:t>30/04/2026</a:t>
             </a:fld>
             <a:endParaRPr lang="en-GB"/>
           </a:p>
@@ -6530,7 +6515,7 @@
           <a:p>
             <a:fld id="{F742B68F-2629-43F7-B359-B7BC46F8462A}" type="datetimeFigureOut">
               <a:rPr lang="en-GB" smtClean="0"/>
-              <a:t>27/04/2026</a:t>
+              <a:t>30/04/2026</a:t>
             </a:fld>
             <a:endParaRPr lang="en-GB"/>
           </a:p>
@@ -6714,7 +6699,7 @@
           <a:p>
             <a:fld id="{F742B68F-2629-43F7-B359-B7BC46F8462A}" type="datetimeFigureOut">
               <a:rPr lang="en-GB" smtClean="0"/>
-              <a:t>27/04/2026</a:t>
+              <a:t>30/04/2026</a:t>
             </a:fld>
             <a:endParaRPr lang="en-GB"/>
           </a:p>
@@ -12034,7 +12019,7 @@
           <a:p>
             <a:fld id="{C764DE79-268F-4C1A-8933-263129D2AF90}" type="datetimeFigureOut">
               <a:rPr lang="en-US" dirty="0"/>
-              <a:t>4/27/2026</a:t>
+              <a:t>4/30/2026</a:t>
             </a:fld>
             <a:endParaRPr lang="en-US" dirty="0"/>
           </a:p>
@@ -13020,34 +13005,24 @@
               <a:buChar char="q"/>
             </a:pPr>
             <a:r>
-              <a:rPr lang="en-GB" b="0" i="0" dirty="0">
+              <a:rPr lang="en-GB" b="0" i="0">
                 <a:solidFill>
                   <a:srgbClr val="0D0D0D"/>
                 </a:solidFill>
                 <a:effectLst/>
                 <a:latin typeface="Söhne"/>
               </a:rPr>
-              <a:t>The </a:t>
-            </a:r>
-            <a:r>
-              <a:rPr lang="en-GB" b="0" i="0" dirty="0" err="1">
+              <a:t>The GitHub </a:t>
+            </a:r>
+            <a:r>
+              <a:rPr lang="en-GB" b="0" i="0" dirty="0">
                 <a:solidFill>
                   <a:srgbClr val="0D0D0D"/>
                 </a:solidFill>
                 <a:effectLst/>
                 <a:latin typeface="Söhne"/>
               </a:rPr>
-              <a:t>GitGub</a:t>
-            </a:r>
-            <a:r>
-              <a:rPr lang="en-GB" b="0" i="0" dirty="0">
-                <a:solidFill>
-                  <a:srgbClr val="0D0D0D"/>
-                </a:solidFill>
-                <a:effectLst/>
-                <a:latin typeface="Söhne"/>
-              </a:rPr>
-              <a:t> wiki contains lessons to learn basic programming skills in Python </a:t>
+              <a:t>wiki contains lessons to learn basic programming skills in Python </a:t>
             </a:r>
             <a:endParaRPr lang="en-GB" dirty="0">
               <a:solidFill>
@@ -16952,21 +16927,6 @@
 </file>
 
 <file path=customXml/item1.xml><?xml version="1.0" encoding="utf-8"?>
-<p:properties xmlns:p="http://schemas.microsoft.com/office/2006/metadata/properties" xmlns:xsi="http://www.w3.org/2001/XMLSchema-instance" xmlns:pc="http://schemas.microsoft.com/office/infopath/2007/PartnerControls">
-  <documentManagement/>
-</p:properties>
-</file>
-
-<file path=customXml/item2.xml><?xml version="1.0" encoding="utf-8"?>
-<?mso-contentType ?>
-<FormTemplates xmlns="http://schemas.microsoft.com/sharepoint/v3/contenttype/forms">
-  <Display>DocumentLibraryForm</Display>
-  <Edit>DocumentLibraryForm</Edit>
-  <New>DocumentLibraryForm</New>
-</FormTemplates>
-</file>
-
-<file path=customXml/item3.xml><?xml version="1.0" encoding="utf-8"?>
 <ct:contentTypeSchema xmlns:ct="http://schemas.microsoft.com/office/2006/metadata/contentType" xmlns:ma="http://schemas.microsoft.com/office/2006/metadata/properties/metaAttributes" ct:_="" ma:_="" ma:contentTypeName="Document" ma:contentTypeID="0x01010013627E55CBB6724AAE06283BCF60731F" ma:contentTypeVersion="17" ma:contentTypeDescription="Create a new document." ma:contentTypeScope="" ma:versionID="dd3919f3d19c6e7e51c56df80843daab">
   <xsd:schema xmlns:xsd="http://www.w3.org/2001/XMLSchema" xmlns:xs="http://www.w3.org/2001/XMLSchema" xmlns:p="http://schemas.microsoft.com/office/2006/metadata/properties" xmlns:ns3="a2c7fd72-0e44-4982-b830-95c31bbca34d" xmlns:ns4="b58096e5-f163-4679-9419-a96bfe444aa3" targetNamespace="http://schemas.microsoft.com/office/2006/metadata/properties" ma:root="true" ma:fieldsID="c9dc4740e88c86948c117aa3282d0b00" ns3:_="" ns4:_="">
     <xsd:import namespace="a2c7fd72-0e44-4982-b830-95c31bbca34d"/>
@@ -17213,32 +17173,22 @@
 </ct:contentTypeSchema>
 </file>
 
-<file path=customXml/itemProps1.xml><?xml version="1.0" encoding="utf-8"?>
-<ds:datastoreItem xmlns:ds="http://schemas.openxmlformats.org/officeDocument/2006/customXml" ds:itemID="{29C56DC5-A29F-4C59-933A-F4533B5A0E14}">
-  <ds:schemaRefs>
-    <ds:schemaRef ds:uri="http://schemas.openxmlformats.org/package/2006/metadata/core-properties"/>
-    <ds:schemaRef ds:uri="http://schemas.microsoft.com/office/2006/documentManagement/types"/>
-    <ds:schemaRef ds:uri="http://schemas.microsoft.com/office/2006/metadata/properties"/>
-    <ds:schemaRef ds:uri="http://schemas.microsoft.com/office/infopath/2007/PartnerControls"/>
-    <ds:schemaRef ds:uri="b58096e5-f163-4679-9419-a96bfe444aa3"/>
-    <ds:schemaRef ds:uri="http://purl.org/dc/elements/1.1/"/>
-    <ds:schemaRef ds:uri="http://purl.org/dc/terms/"/>
-    <ds:schemaRef ds:uri="http://purl.org/dc/dcmitype/"/>
-    <ds:schemaRef ds:uri="a2c7fd72-0e44-4982-b830-95c31bbca34d"/>
-    <ds:schemaRef ds:uri="http://www.w3.org/XML/1998/namespace"/>
-  </ds:schemaRefs>
-</ds:datastoreItem>
+<file path=customXml/item2.xml><?xml version="1.0" encoding="utf-8"?>
+<?mso-contentType ?>
+<FormTemplates xmlns="http://schemas.microsoft.com/sharepoint/v3/contenttype/forms">
+  <Display>DocumentLibraryForm</Display>
+  <Edit>DocumentLibraryForm</Edit>
+  <New>DocumentLibraryForm</New>
+</FormTemplates>
 </file>
 
-<file path=customXml/itemProps2.xml><?xml version="1.0" encoding="utf-8"?>
-<ds:datastoreItem xmlns:ds="http://schemas.openxmlformats.org/officeDocument/2006/customXml" ds:itemID="{CABEF9B3-E2EC-4A51-BCE4-2B16174DD0F7}">
-  <ds:schemaRefs>
-    <ds:schemaRef ds:uri="http://schemas.microsoft.com/sharepoint/v3/contenttype/forms"/>
-  </ds:schemaRefs>
-</ds:datastoreItem>
+<file path=customXml/item3.xml><?xml version="1.0" encoding="utf-8"?>
+<p:properties xmlns:p="http://schemas.microsoft.com/office/2006/metadata/properties" xmlns:xsi="http://www.w3.org/2001/XMLSchema-instance" xmlns:pc="http://schemas.microsoft.com/office/infopath/2007/PartnerControls">
+  <documentManagement/>
+</p:properties>
 </file>
 
-<file path=customXml/itemProps3.xml><?xml version="1.0" encoding="utf-8"?>
+<file path=customXml/itemProps1.xml><?xml version="1.0" encoding="utf-8"?>
 <ds:datastoreItem xmlns:ds="http://schemas.openxmlformats.org/officeDocument/2006/customXml" ds:itemID="{50C66D88-E5E3-4E4D-B0F8-FDBF715C5754}">
   <ds:schemaRefs>
     <ds:schemaRef ds:uri="http://schemas.microsoft.com/office/2006/metadata/contentType"/>
@@ -17255,4 +17205,29 @@
     <ds:schemaRef ds:uri="http://schemas.microsoft.com/internal/obd"/>
   </ds:schemaRefs>
 </ds:datastoreItem>
+</file>
+
+<file path=customXml/itemProps2.xml><?xml version="1.0" encoding="utf-8"?>
+<ds:datastoreItem xmlns:ds="http://schemas.openxmlformats.org/officeDocument/2006/customXml" ds:itemID="{CABEF9B3-E2EC-4A51-BCE4-2B16174DD0F7}">
+  <ds:schemaRefs>
+    <ds:schemaRef ds:uri="http://schemas.microsoft.com/sharepoint/v3/contenttype/forms"/>
+  </ds:schemaRefs>
+</ds:datastoreItem>
+</file>
+
+<file path=customXml/itemProps3.xml><?xml version="1.0" encoding="utf-8"?>
+<ds:datastoreItem xmlns:ds="http://schemas.openxmlformats.org/officeDocument/2006/customXml" ds:itemID="{29C56DC5-A29F-4C59-933A-F4533B5A0E14}">
+  <ds:schemaRefs>
+    <ds:schemaRef ds:uri="http://schemas.openxmlformats.org/package/2006/metadata/core-properties"/>
+    <ds:schemaRef ds:uri="http://schemas.microsoft.com/office/2006/documentManagement/types"/>
+    <ds:schemaRef ds:uri="http://schemas.microsoft.com/office/2006/metadata/properties"/>
+    <ds:schemaRef ds:uri="http://schemas.microsoft.com/office/infopath/2007/PartnerControls"/>
+    <ds:schemaRef ds:uri="b58096e5-f163-4679-9419-a96bfe444aa3"/>
+    <ds:schemaRef ds:uri="http://purl.org/dc/elements/1.1/"/>
+    <ds:schemaRef ds:uri="http://purl.org/dc/terms/"/>
+    <ds:schemaRef ds:uri="http://purl.org/dc/dcmitype/"/>
+    <ds:schemaRef ds:uri="a2c7fd72-0e44-4982-b830-95c31bbca34d"/>
+    <ds:schemaRef ds:uri="http://www.w3.org/XML/1998/namespace"/>
+  </ds:schemaRefs>
+</ds:datastoreItem>
 </file>